--- a/CohortFit_pitch_deck.pptx
+++ b/CohortFit_pitch_deck.pptx
@@ -766,7 +766,7 @@
           <a:lstStyle/>
           <a:p>
             <a:r>
-              <a:t>[~30s] The AI is used only where it's necessary. Your words become a validated JSON query — strict structured outputs with the real column names as enums, so the model can't hallucinate a column. A deterministic DuckDB compiler runs it; the model never writes executable SQL. Every claim traces back to a source row, and when the data can't support an answer it abstains. The provenance funnel shows 100 patients down to the 9 that match — every step visible.</a:t>
+              <a:t>[~30s] The AI is used only where it's necessary. Your words become a validated JSON query with strict structured outputs, and a deterministic DuckDB compiler validates every field against the schema before running it — so the model never writes executable SQL, and a hallucinated column becomes a clarification, not a bad query. Every claim traces back to a source row, and when the data can't support an answer it abstains. The provenance funnel shows 100 patients down to the 9 that match — every step visible.</a:t>
             </a:r>
           </a:p>
         </p:txBody>
@@ -4009,7 +4009,7 @@
                 <a:ea typeface="Hanken Grotesk" pitchFamily="34" charset="-122"/>
                 <a:cs typeface="Hanken Grotesk" pitchFamily="34" charset="-120"/>
               </a:rPr>
-              <a:t>Strict structured outputs, column enums</a:t>
+              <a:t>Strict structured outputs; fields schema-checked</a:t>
             </a:r>
             <a:endParaRPr lang="en-US" sz="1875" dirty="0"/>
           </a:p>
